--- a/stage4_genai/02_huggingface/Lecture-15-HuggingFace.pptx
+++ b/stage4_genai/02_huggingface/Lecture-15-HuggingFace.pptx
@@ -8308,6 +8308,9 @@
           <a:lstStyle/>
           <a:p>
             <a:r>
+              <a:rPr>
+                <a:latin typeface="Calibri"/>
+              </a:rPr>
               <a:t>AI Basic Training</a:t>
             </a:r>
           </a:p>
@@ -8329,6 +8332,9 @@
           <a:lstStyle/>
           <a:p>
             <a:r>
+              <a:rPr>
+                <a:latin typeface="Calibri"/>
+              </a:rPr>
               <a:t>Lesson 4.2  |  Stage 4: Generative AI</a:t>
             </a:r>
           </a:p>
@@ -8350,6 +8356,9 @@
           <a:lstStyle/>
           <a:p>
             <a:r>
+              <a:rPr b="1">
+                <a:latin typeface="Calibri"/>
+              </a:rPr>
               <a:t>HuggingFace Pre-trained Models</a:t>
             </a:r>
           </a:p>
@@ -8371,6 +8380,9 @@
           <a:lstStyle/>
           <a:p>
             <a:r>
+              <a:rPr>
+                <a:latin typeface="Calibri"/>
+              </a:rPr>
               <a:t>Use What Already Exists  -  No Training Required</a:t>
             </a:r>
           </a:p>
@@ -8410,11 +8422,17 @@
           <a:lstStyle/>
           <a:p>
             <a:r>
+              <a:rPr b="1">
+                <a:latin typeface="Calibri"/>
+              </a:rPr>
               <a:t>Sentence Embeddings</a:t>
             </a:r>
           </a:p>
           <a:p>
             <a:r>
+              <a:rPr b="1">
+                <a:latin typeface="Calibri"/>
+              </a:rPr>
               <a:t>and Semantic Search</a:t>
             </a:r>
           </a:p>
@@ -8436,6 +8454,9 @@
           <a:lstStyle/>
           <a:p>
             <a:r>
+              <a:rPr b="1">
+                <a:latin typeface="Calibri"/>
+              </a:rPr>
               <a:t>04</a:t>
             </a:r>
           </a:p>
@@ -8475,6 +8496,9 @@
           <a:lstStyle/>
           <a:p>
             <a:r>
+              <a:rPr b="1">
+                <a:latin typeface="Calibri"/>
+              </a:rPr>
               <a:t>The Foundation of RAG Systems</a:t>
             </a:r>
           </a:p>
@@ -8496,67 +8520,89 @@
           <a:lstStyle/>
           <a:p>
             <a:r>
-              <a:rPr sz="1500"/>
+              <a:rPr sz="1500">
+                <a:latin typeface="Calibri"/>
+              </a:rPr>
               <a:t>from sentence_transformers import SentenceTransformer</a:t>
             </a:r>
           </a:p>
           <a:p>
             <a:r>
-              <a:rPr sz="1500"/>
+              <a:rPr sz="1500">
+                <a:latin typeface="Calibri"/>
+              </a:rPr>
               <a:t/>
             </a:r>
           </a:p>
           <a:p>
             <a:r>
-              <a:rPr sz="1500"/>
+              <a:rPr sz="1500">
+                <a:latin typeface="Calibri"/>
+              </a:rPr>
               <a:t>model = SentenceTransformer('all-MiniLM-L6-v2')</a:t>
             </a:r>
           </a:p>
           <a:p>
             <a:r>
-              <a:rPr sz="1500"/>
+              <a:rPr sz="1500">
+                <a:latin typeface="Calibri"/>
+              </a:rPr>
               <a:t>embeddings = model.encode(documents)</a:t>
             </a:r>
           </a:p>
           <a:p>
             <a:r>
-              <a:rPr sz="1500"/>
+              <a:rPr sz="1500">
+                <a:latin typeface="Calibri"/>
+              </a:rPr>
               <a:t/>
             </a:r>
           </a:p>
           <a:p>
             <a:r>
-              <a:rPr sz="1500"/>
+              <a:rPr sz="1500">
+                <a:latin typeface="Calibri"/>
+              </a:rPr>
               <a:t># Query</a:t>
             </a:r>
           </a:p>
           <a:p>
             <a:r>
-              <a:rPr sz="1500"/>
+              <a:rPr sz="1500">
+                <a:latin typeface="Calibri"/>
+              </a:rPr>
               <a:t>q_vec = model.encode(['What is CVE-2024-1234?'])</a:t>
             </a:r>
           </a:p>
           <a:p>
             <a:r>
-              <a:rPr sz="1500"/>
+              <a:rPr sz="1500">
+                <a:latin typeface="Calibri"/>
+              </a:rPr>
               <a:t>similarities = cosine_similarity(q_vec, embeddings)</a:t>
             </a:r>
           </a:p>
           <a:p>
             <a:r>
-              <a:rPr sz="1500"/>
+              <a:rPr sz="1500">
+                <a:latin typeface="Calibri"/>
+              </a:rPr>
               <a:t/>
             </a:r>
           </a:p>
           <a:p>
             <a:r>
-              <a:rPr sz="1500"/>
+              <a:rPr sz="1500">
+                <a:latin typeface="Calibri"/>
+              </a:rPr>
               <a:t>Similar meaning = similar vectors</a:t>
             </a:r>
           </a:p>
           <a:p>
             <a:r>
-              <a:rPr sz="1500"/>
+              <a:rPr sz="1500">
+                <a:latin typeface="Calibri"/>
+              </a:rPr>
               <a:t>This is exactly how RAG retrieval works (Lesson 4.4)</a:t>
             </a:r>
           </a:p>
@@ -8596,11 +8642,17 @@
           <a:lstStyle/>
           <a:p>
             <a:r>
+              <a:rPr b="1">
+                <a:latin typeface="Calibri"/>
+              </a:rPr>
               <a:t>Workshop</a:t>
             </a:r>
           </a:p>
           <a:p>
             <a:r>
+              <a:rPr b="1">
+                <a:latin typeface="Calibri"/>
+              </a:rPr>
               <a:t>and Next Steps</a:t>
             </a:r>
           </a:p>
@@ -8622,6 +8674,9 @@
           <a:lstStyle/>
           <a:p>
             <a:r>
+              <a:rPr b="1">
+                <a:latin typeface="Calibri"/>
+              </a:rPr>
               <a:t>05</a:t>
             </a:r>
           </a:p>
@@ -8661,6 +8716,9 @@
           <a:lstStyle/>
           <a:p>
             <a:r>
+              <a:rPr b="1">
+                <a:latin typeface="Calibri"/>
+              </a:rPr>
               <a:t>Workshop: 3 Hands-On Exercises</a:t>
             </a:r>
           </a:p>
@@ -8682,37 +8740,49 @@
           <a:lstStyle/>
           <a:p>
             <a:r>
-              <a:rPr sz="1600"/>
+              <a:rPr sz="1600">
+                <a:latin typeface="Calibri"/>
+              </a:rPr>
               <a:t>Exercise 1:  Zero-shot classification on security logs</a:t>
             </a:r>
           </a:p>
           <a:p>
             <a:r>
-              <a:rPr sz="1600"/>
+              <a:rPr sz="1600">
+                <a:latin typeface="Calibri"/>
+              </a:rPr>
               <a:t>Exercise 2:  Sentence embeddings - encode, compare, measure similarity</a:t>
             </a:r>
           </a:p>
           <a:p>
             <a:r>
-              <a:rPr sz="1600"/>
+              <a:rPr sz="1600">
+                <a:latin typeface="Calibri"/>
+              </a:rPr>
               <a:t>Exercise 3:  Build a semantic search engine over a security knowledge base</a:t>
             </a:r>
           </a:p>
           <a:p>
             <a:r>
-              <a:rPr sz="1600"/>
+              <a:rPr sz="1600">
+                <a:latin typeface="Calibri"/>
+              </a:rPr>
               <a:t/>
             </a:r>
           </a:p>
           <a:p>
             <a:r>
-              <a:rPr sz="1600"/>
+              <a:rPr sz="1600">
+                <a:latin typeface="Calibri"/>
+              </a:rPr>
               <a:t>First run downloads model weights (~200-500MB), then instant</a:t>
             </a:r>
           </a:p>
           <a:p>
             <a:r>
-              <a:rPr sz="1600"/>
+              <a:rPr sz="1600">
+                <a:latin typeface="Calibri"/>
+              </a:rPr>
               <a:t>All exercises work on CPU - no GPU required</a:t>
             </a:r>
           </a:p>
@@ -8752,37 +8822,49 @@
           <a:lstStyle/>
           <a:p>
             <a:r>
-              <a:rPr sz="1500"/>
+              <a:rPr sz="1500">
+                <a:latin typeface="Calibri"/>
+              </a:rPr>
               <a:t>HuggingFace pipeline API: pre-trained NLP in 3 lines of code</a:t>
             </a:r>
           </a:p>
           <a:p>
             <a:r>
-              <a:rPr sz="1500"/>
+              <a:rPr sz="1500">
+                <a:latin typeface="Calibri"/>
+              </a:rPr>
               <a:t>Zero-shot classification: any categories, no training data needed</a:t>
             </a:r>
           </a:p>
           <a:p>
             <a:r>
-              <a:rPr sz="1500"/>
+              <a:rPr sz="1500">
+                <a:latin typeface="Calibri"/>
+              </a:rPr>
               <a:t>Sentence embeddings: meaning as vectors, cosine similarity = semantic match</a:t>
             </a:r>
           </a:p>
           <a:p>
             <a:r>
-              <a:rPr sz="1500"/>
+              <a:rPr sz="1500">
+                <a:latin typeface="Calibri"/>
+              </a:rPr>
               <a:t>Semantic search: the retrieval component of RAG systems</a:t>
             </a:r>
           </a:p>
           <a:p>
             <a:r>
-              <a:rPr sz="1500"/>
+              <a:rPr sz="1500">
+                <a:latin typeface="Calibri"/>
+              </a:rPr>
               <a:t>Models download once and cache locally - CPU is sufficient</a:t>
             </a:r>
           </a:p>
           <a:p>
             <a:r>
-              <a:rPr sz="1500"/>
+              <a:rPr sz="1500">
+                <a:latin typeface="Calibri"/>
+              </a:rPr>
               <a:t>Next: LLM API - build a conversational threat intelligence assistant</a:t>
             </a:r>
           </a:p>
@@ -8804,11 +8886,17 @@
           <a:lstStyle/>
           <a:p>
             <a:r>
+              <a:rPr b="1">
+                <a:latin typeface="Calibri"/>
+              </a:rPr>
               <a:t>Key</a:t>
             </a:r>
           </a:p>
           <a:p>
             <a:r>
+              <a:rPr b="1">
+                <a:latin typeface="Calibri"/>
+              </a:rPr>
               <a:t>Takeaways</a:t>
             </a:r>
           </a:p>
@@ -8848,6 +8936,9 @@
           <a:lstStyle/>
           <a:p>
             <a:r>
+              <a:rPr>
+                <a:latin typeface="Calibri"/>
+              </a:rPr>
               <a:t>Next:  Lesson 4.3 - The LLM API</a:t>
             </a:r>
           </a:p>
@@ -8869,6 +8960,9 @@
           <a:lstStyle/>
           <a:p>
             <a:r>
+              <a:rPr b="1">
+                <a:latin typeface="Calibri"/>
+              </a:rPr>
               <a:t>HuggingFace Pre-trained Models</a:t>
             </a:r>
           </a:p>
@@ -8908,31 +9002,41 @@
           <a:lstStyle/>
           <a:p>
             <a:r>
-              <a:rPr sz="1600"/>
+              <a:rPr sz="1600">
+                <a:latin typeface="Calibri"/>
+              </a:rPr>
               <a:t>The HuggingFace pipeline API - 3 lines of code</a:t>
             </a:r>
           </a:p>
           <a:p>
             <a:r>
-              <a:rPr sz="1600"/>
+              <a:rPr sz="1600">
+                <a:latin typeface="Calibri"/>
+              </a:rPr>
               <a:t>Available tasks: classification, NER, summarisation</a:t>
             </a:r>
           </a:p>
           <a:p>
             <a:r>
-              <a:rPr sz="1600"/>
+              <a:rPr sz="1600">
+                <a:latin typeface="Calibri"/>
+              </a:rPr>
               <a:t>Zero-shot classification - no training data needed</a:t>
             </a:r>
           </a:p>
           <a:p>
             <a:r>
-              <a:rPr sz="1600"/>
+              <a:rPr sz="1600">
+                <a:latin typeface="Calibri"/>
+              </a:rPr>
               <a:t>Sentence embeddings and semantic search</a:t>
             </a:r>
           </a:p>
           <a:p>
             <a:r>
-              <a:rPr sz="1600"/>
+              <a:rPr sz="1600">
+                <a:latin typeface="Calibri"/>
+              </a:rPr>
               <a:t>The foundation for RAG systems</a:t>
             </a:r>
           </a:p>
@@ -8954,6 +9058,9 @@
           <a:lstStyle/>
           <a:p>
             <a:r>
+              <a:rPr b="1">
+                <a:latin typeface="Calibri"/>
+              </a:rPr>
               <a:t>What We'll Cover</a:t>
             </a:r>
           </a:p>
@@ -8993,11 +9100,17 @@
           <a:lstStyle/>
           <a:p>
             <a:r>
+              <a:rPr b="1">
+                <a:latin typeface="Calibri"/>
+              </a:rPr>
               <a:t>The Pipeline</a:t>
             </a:r>
           </a:p>
           <a:p>
             <a:r>
+              <a:rPr b="1">
+                <a:latin typeface="Calibri"/>
+              </a:rPr>
               <a:t>API</a:t>
             </a:r>
           </a:p>
@@ -9019,6 +9132,9 @@
           <a:lstStyle/>
           <a:p>
             <a:r>
+              <a:rPr b="1">
+                <a:latin typeface="Calibri"/>
+              </a:rPr>
               <a:t>01</a:t>
             </a:r>
           </a:p>
@@ -9058,6 +9174,9 @@
           <a:lstStyle/>
           <a:p>
             <a:r>
+              <a:rPr b="1">
+                <a:latin typeface="Calibri"/>
+              </a:rPr>
               <a:t>From Text to Result in One Call</a:t>
             </a:r>
           </a:p>
@@ -9121,6 +9240,9 @@
           <a:lstStyle/>
           <a:p>
             <a:r>
+              <a:rPr b="1">
+                <a:latin typeface="Calibri"/>
+              </a:rPr>
               <a:t>Three Lines of Code</a:t>
             </a:r>
           </a:p>
@@ -9142,61 +9264,81 @@
           <a:lstStyle/>
           <a:p>
             <a:r>
-              <a:rPr sz="1500"/>
+              <a:rPr sz="1500">
+                <a:latin typeface="Calibri"/>
+              </a:rPr>
               <a:t>from transformers import pipeline</a:t>
             </a:r>
           </a:p>
           <a:p>
             <a:r>
-              <a:rPr sz="1500"/>
+              <a:rPr sz="1500">
+                <a:latin typeface="Calibri"/>
+              </a:rPr>
               <a:t/>
             </a:r>
           </a:p>
           <a:p>
             <a:r>
-              <a:rPr sz="1500"/>
+              <a:rPr sz="1500">
+                <a:latin typeface="Calibri"/>
+              </a:rPr>
               <a:t>classifier = pipeline("text-classification",</a:t>
             </a:r>
           </a:p>
           <a:p>
             <a:r>
-              <a:rPr sz="1500"/>
+              <a:rPr sz="1500">
+                <a:latin typeface="Calibri"/>
+              </a:rPr>
               <a:t>    model="distilbert-base-uncased-finetuned-sst-2-english")</a:t>
             </a:r>
           </a:p>
           <a:p>
             <a:r>
-              <a:rPr sz="1500"/>
+              <a:rPr sz="1500">
+                <a:latin typeface="Calibri"/>
+              </a:rPr>
               <a:t/>
             </a:r>
           </a:p>
           <a:p>
             <a:r>
-              <a:rPr sz="1500"/>
+              <a:rPr sz="1500">
+                <a:latin typeface="Calibri"/>
+              </a:rPr>
               <a:t>result = classifier("This threat report is alarming.")</a:t>
             </a:r>
           </a:p>
           <a:p>
             <a:r>
-              <a:rPr sz="1500"/>
+              <a:rPr sz="1500">
+                <a:latin typeface="Calibri"/>
+              </a:rPr>
               <a:t># [{'label': 'NEGATIVE', 'score': 0.98}]</a:t>
             </a:r>
           </a:p>
           <a:p>
             <a:r>
-              <a:rPr sz="1500"/>
+              <a:rPr sz="1500">
+                <a:latin typeface="Calibri"/>
+              </a:rPr>
               <a:t/>
             </a:r>
           </a:p>
           <a:p>
             <a:r>
-              <a:rPr sz="1500"/>
+              <a:rPr sz="1500">
+                <a:latin typeface="Calibri"/>
+              </a:rPr>
               <a:t>HuggingFace handles tokenisation, model loading,</a:t>
             </a:r>
           </a:p>
           <a:p>
             <a:r>
-              <a:rPr sz="1500"/>
+              <a:rPr sz="1500">
+                <a:latin typeface="Calibri"/>
+              </a:rPr>
               <a:t>and post-processing automatically</a:t>
             </a:r>
           </a:p>
@@ -9236,11 +9378,17 @@
           <a:lstStyle/>
           <a:p>
             <a:r>
+              <a:rPr b="1">
+                <a:latin typeface="Calibri"/>
+              </a:rPr>
               <a:t>Available</a:t>
             </a:r>
           </a:p>
           <a:p>
             <a:r>
+              <a:rPr b="1">
+                <a:latin typeface="Calibri"/>
+              </a:rPr>
               <a:t>Tasks</a:t>
             </a:r>
           </a:p>
@@ -9262,6 +9410,9 @@
           <a:lstStyle/>
           <a:p>
             <a:r>
+              <a:rPr b="1">
+                <a:latin typeface="Calibri"/>
+              </a:rPr>
               <a:t>02</a:t>
             </a:r>
           </a:p>
@@ -9301,6 +9452,9 @@
           <a:lstStyle/>
           <a:p>
             <a:r>
+              <a:rPr b="1">
+                <a:latin typeface="Calibri"/>
+              </a:rPr>
               <a:t>Out-of-the-Box NLP Tasks for Security</a:t>
             </a:r>
           </a:p>
@@ -9364,11 +9518,17 @@
           <a:lstStyle/>
           <a:p>
             <a:r>
+              <a:rPr b="1">
+                <a:latin typeface="Calibri"/>
+              </a:rPr>
               <a:t>Zero-Shot</a:t>
             </a:r>
           </a:p>
           <a:p>
             <a:r>
+              <a:rPr b="1">
+                <a:latin typeface="Calibri"/>
+              </a:rPr>
               <a:t>Classification</a:t>
             </a:r>
           </a:p>
@@ -9390,6 +9550,9 @@
           <a:lstStyle/>
           <a:p>
             <a:r>
+              <a:rPr b="1">
+                <a:latin typeface="Calibri"/>
+              </a:rPr>
               <a:t>03</a:t>
             </a:r>
           </a:p>
@@ -9429,6 +9592,9 @@
           <a:lstStyle/>
           <a:p>
             <a:r>
+              <a:rPr>
+                <a:latin typeface="Calibri"/>
+              </a:rPr>
               <a:t/>
             </a:r>
           </a:p>
@@ -9450,37 +9616,49 @@
           <a:lstStyle/>
           <a:p>
             <a:r>
-              <a:rPr sz="1400"/>
+              <a:rPr sz="1400">
+                <a:latin typeface="Calibri"/>
+              </a:rPr>
               <a:t>Map any security log line</a:t>
             </a:r>
           </a:p>
           <a:p>
             <a:r>
-              <a:rPr sz="1400"/>
+              <a:rPr sz="1400">
+                <a:latin typeface="Calibri"/>
+              </a:rPr>
               <a:t>to MITRE ATT&amp;CK tactics</a:t>
             </a:r>
           </a:p>
           <a:p>
             <a:r>
-              <a:rPr sz="1400"/>
+              <a:rPr sz="1400">
+                <a:latin typeface="Calibri"/>
+              </a:rPr>
               <a:t>with zero training data.</a:t>
             </a:r>
           </a:p>
           <a:p>
             <a:r>
-              <a:rPr sz="1400"/>
+              <a:rPr sz="1400">
+                <a:latin typeface="Calibri"/>
+              </a:rPr>
               <a:t/>
             </a:r>
           </a:p>
           <a:p>
             <a:r>
-              <a:rPr sz="1400"/>
+              <a:rPr sz="1400">
+                <a:latin typeface="Calibri"/>
+              </a:rPr>
               <a:t>Define your categories</a:t>
             </a:r>
           </a:p>
           <a:p>
             <a:r>
-              <a:rPr sz="1400"/>
+              <a:rPr sz="1400">
+                <a:latin typeface="Calibri"/>
+              </a:rPr>
               <a:t>at call time.</a:t>
             </a:r>
           </a:p>
@@ -9502,6 +9680,9 @@
           <a:lstStyle/>
           <a:p>
             <a:r>
+              <a:rPr b="1">
+                <a:latin typeface="Calibri"/>
+              </a:rPr>
               <a:t>Classify Into Any Categories - No Training Needed</a:t>
             </a:r>
           </a:p>
@@ -9523,61 +9704,81 @@
           <a:lstStyle/>
           <a:p>
             <a:r>
-              <a:rPr sz="1400"/>
+              <a:rPr sz="1400">
+                <a:latin typeface="Calibri"/>
+              </a:rPr>
               <a:t>classifier = pipeline("zero-shot-classification",</a:t>
             </a:r>
           </a:p>
           <a:p>
             <a:r>
-              <a:rPr sz="1400"/>
+              <a:rPr sz="1400">
+                <a:latin typeface="Calibri"/>
+              </a:rPr>
               <a:t/>
             </a:r>
           </a:p>
           <a:p>
             <a:r>
-              <a:rPr sz="1400"/>
+              <a:rPr sz="1400">
+                <a:latin typeface="Calibri"/>
+              </a:rPr>
               <a:t>result = classifier(</a:t>
             </a:r>
           </a:p>
           <a:p>
             <a:r>
-              <a:rPr sz="1400"/>
+              <a:rPr sz="1400">
+                <a:latin typeface="Calibri"/>
+              </a:rPr>
               <a:t>  "Lateral movement: SMB to 15 hosts",</a:t>
             </a:r>
           </a:p>
           <a:p>
             <a:r>
-              <a:rPr sz="1400"/>
+              <a:rPr sz="1400">
+                <a:latin typeface="Calibri"/>
+              </a:rPr>
               <a:t>  candidate_labels=["lateral movement",</a:t>
             </a:r>
           </a:p>
           <a:p>
             <a:r>
-              <a:rPr sz="1400"/>
+              <a:rPr sz="1400">
+                <a:latin typeface="Calibri"/>
+              </a:rPr>
               <a:t>    "data exfiltration", "persistence"]</a:t>
             </a:r>
           </a:p>
           <a:p>
             <a:r>
-              <a:rPr sz="1400"/>
+              <a:rPr sz="1400">
+                <a:latin typeface="Calibri"/>
+              </a:rPr>
               <a:t>)</a:t>
             </a:r>
           </a:p>
           <a:p>
             <a:r>
-              <a:rPr sz="1400"/>
+              <a:rPr sz="1400">
+                <a:latin typeface="Calibri"/>
+              </a:rPr>
               <a:t/>
             </a:r>
           </a:p>
           <a:p>
             <a:r>
-              <a:rPr sz="1400"/>
+              <a:rPr sz="1400">
+                <a:latin typeface="Calibri"/>
+              </a:rPr>
               <a:t>Returns labels sorted by confidence</a:t>
             </a:r>
           </a:p>
           <a:p>
             <a:r>
-              <a:rPr sz="1400"/>
+              <a:rPr sz="1400">
+                <a:latin typeface="Calibri"/>
+              </a:rPr>
               <a:t>Define categories at call time</a:t>
             </a:r>
           </a:p>
